--- a/assets/pptx/catalog-688.pptx
+++ b/assets/pptx/catalog-688.pptx
@@ -3277,7 +3277,7 @@
                 <a:ea typeface="Ebrima"/>
                 <a:cs typeface="Ebrima"/>
               </a:rPr>
-              <a:t>(2x)</a:t>
+              <a:t>2x</a:t>
             </a:r>
           </a:p>
           <a:p>
@@ -3331,7 +3331,7 @@
                 <a:ea typeface="Ebrima"/>
                 <a:cs typeface="Ebrima"/>
               </a:rPr>
-              <a:t>(2x)</a:t>
+              <a:t>2x</a:t>
             </a:r>
           </a:p>
           <a:p>
@@ -3385,7 +3385,7 @@
                 <a:ea typeface="Ebrima"/>
                 <a:cs typeface="Ebrima"/>
               </a:rPr>
-              <a:t>ቅኔን ልቀኝለት (2x)</a:t>
+              <a:t>ቅኔን ልቀኝለት 2x</a:t>
             </a:r>
           </a:p>
           <a:p>
@@ -3421,7 +3421,7 @@
                 <a:ea typeface="Ebrima"/>
                 <a:cs typeface="Ebrima"/>
               </a:rPr>
-              <a:t>(3x) እስቲ ልናገረው</a:t>
+              <a:t>3x እስቲ ልናገረው</a:t>
             </a:r>
           </a:p>
           <a:p>
@@ -3511,7 +3511,7 @@
                 <a:ea typeface="Ebrima"/>
                 <a:cs typeface="Ebrima"/>
               </a:rPr>
-              <a:t>(2x)</a:t>
+              <a:t>2x</a:t>
             </a:r>
           </a:p>
           <a:p>
@@ -3583,7 +3583,7 @@
                 <a:ea typeface="Ebrima"/>
                 <a:cs typeface="Ebrima"/>
               </a:rPr>
-              <a:t>(2x)</a:t>
+              <a:t>2x</a:t>
             </a:r>
           </a:p>
           <a:p>
@@ -3637,25 +3637,25 @@
                 <a:ea typeface="Ebrima"/>
                 <a:cs typeface="Ebrima"/>
               </a:rPr>
-              <a:t>የማይጠገቡ ናቸው, (2x), አምልኮው ለአንተ, ዝማሬው ለአንተ, ዕልልታው ለአንተ</a:t>
-            </a:r>
-          </a:p>
-          <a:p>
-            <a:pPr algn="ctr">
-              <a:lnSpc>
-                <a:spcPct val="125000"/>
-              </a:lnSpc>
-            </a:pPr>
-            <a:r>
-              <a:rPr sz="2400" b="0">
-                <a:solidFill>
-                  <a:srgbClr val="FFFFFF"/>
-                </a:solidFill>
-                <a:latin typeface="Ebrima"/>
-                <a:ea typeface="Ebrima"/>
-                <a:cs typeface="Ebrima"/>
-              </a:rPr>
-              <a:t>ጭብጨባው ለአንተ (2x)</a:t>
+              <a:t>የማይጠገቡ ናቸው, 2x, አምልኮው ለአንተ, ዝማሬው ለአንተ, ዕልልታው ለአንተ</a:t>
+            </a:r>
+          </a:p>
+          <a:p>
+            <a:pPr algn="ctr">
+              <a:lnSpc>
+                <a:spcPct val="125000"/>
+              </a:lnSpc>
+            </a:pPr>
+            <a:r>
+              <a:rPr sz="2400" b="0">
+                <a:solidFill>
+                  <a:srgbClr val="FFFFFF"/>
+                </a:solidFill>
+                <a:latin typeface="Ebrima"/>
+                <a:ea typeface="Ebrima"/>
+                <a:cs typeface="Ebrima"/>
+              </a:rPr>
+              <a:t>ጭብጨባው ለአንተ 2x</a:t>
             </a:r>
           </a:p>
           <a:p>
@@ -3691,7 +3691,7 @@
                 <a:ea typeface="Ebrima"/>
                 <a:cs typeface="Ebrima"/>
               </a:rPr>
-              <a:t>(3x) እስቲ ልናገረው</a:t>
+              <a:t>3x እስቲ ልናገረው</a:t>
             </a:r>
           </a:p>
           <a:p>
@@ -3781,7 +3781,7 @@
                 <a:ea typeface="Ebrima"/>
                 <a:cs typeface="Ebrima"/>
               </a:rPr>
-              <a:t>(2x)</a:t>
+              <a:t>2x</a:t>
             </a:r>
           </a:p>
           <a:p>
@@ -3853,7 +3853,7 @@
                 <a:ea typeface="Ebrima"/>
                 <a:cs typeface="Ebrima"/>
               </a:rPr>
-              <a:t>(2x)</a:t>
+              <a:t>2x</a:t>
             </a:r>
           </a:p>
           <a:p>
@@ -3907,25 +3907,25 @@
                 <a:ea typeface="Ebrima"/>
                 <a:cs typeface="Ebrima"/>
               </a:rPr>
-              <a:t>ይኸው መጥቻለሁ, (2x), አምልኮው ለአንተ, ዝማሬው ለአንተ, ዕልልታው ለአንተ</a:t>
-            </a:r>
-          </a:p>
-          <a:p>
-            <a:pPr algn="ctr">
-              <a:lnSpc>
-                <a:spcPct val="125000"/>
-              </a:lnSpc>
-            </a:pPr>
-            <a:r>
-              <a:rPr sz="2400" b="0">
-                <a:solidFill>
-                  <a:srgbClr val="FFFFFF"/>
-                </a:solidFill>
-                <a:latin typeface="Ebrima"/>
-                <a:ea typeface="Ebrima"/>
-                <a:cs typeface="Ebrima"/>
-              </a:rPr>
-              <a:t>ጭብጨባው ለአንተ (2x)</a:t>
+              <a:t>ይኸው መጥቻለሁ, 2x, አምልኮው ለአንተ, ዝማሬው ለአንተ, ዕልልታው ለአንተ</a:t>
+            </a:r>
+          </a:p>
+          <a:p>
+            <a:pPr algn="ctr">
+              <a:lnSpc>
+                <a:spcPct val="125000"/>
+              </a:lnSpc>
+            </a:pPr>
+            <a:r>
+              <a:rPr sz="2400" b="0">
+                <a:solidFill>
+                  <a:srgbClr val="FFFFFF"/>
+                </a:solidFill>
+                <a:latin typeface="Ebrima"/>
+                <a:ea typeface="Ebrima"/>
+                <a:cs typeface="Ebrima"/>
+              </a:rPr>
+              <a:t>ጭብጨባው ለአንተ 2x</a:t>
             </a:r>
           </a:p>
           <a:p>
@@ -3961,7 +3961,7 @@
                 <a:ea typeface="Ebrima"/>
                 <a:cs typeface="Ebrima"/>
               </a:rPr>
-              <a:t>(3x) እስቲ ልናገረው</a:t>
+              <a:t>3x እስቲ ልናገረው</a:t>
             </a:r>
           </a:p>
           <a:p>
@@ -4051,7 +4051,7 @@
                 <a:ea typeface="Ebrima"/>
                 <a:cs typeface="Ebrima"/>
               </a:rPr>
-              <a:t>(2x)</a:t>
+              <a:t>2x</a:t>
             </a:r>
           </a:p>
           <a:p>
@@ -4123,7 +4123,7 @@
                 <a:ea typeface="Ebrima"/>
                 <a:cs typeface="Ebrima"/>
               </a:rPr>
-              <a:t>ጭብጨባው ለአንተ (2x)</a:t>
+              <a:t>ጭብጨባው ለአንተ 2x</a:t>
             </a:r>
           </a:p>
         </p:txBody>
